--- a/docs/src/assets/Fig1_index.pptx
+++ b/docs/src/assets/Fig1_index.pptx
@@ -261,7 +261,7 @@
           <a:p>
             <a:fld id="{418CA6B7-7294-49BE-8894-FBC98B4D1603}" type="datetimeFigureOut">
               <a:rPr lang="en-US" smtClean="0"/>
-              <a:t>2/13/2026</a:t>
+              <a:t>3/5/2026</a:t>
             </a:fld>
             <a:endParaRPr lang="en-US" dirty="0"/>
           </a:p>
@@ -461,7 +461,7 @@
           <a:p>
             <a:fld id="{418CA6B7-7294-49BE-8894-FBC98B4D1603}" type="datetimeFigureOut">
               <a:rPr lang="en-US" smtClean="0"/>
-              <a:t>2/13/2026</a:t>
+              <a:t>3/5/2026</a:t>
             </a:fld>
             <a:endParaRPr lang="en-US" dirty="0"/>
           </a:p>
@@ -671,7 +671,7 @@
           <a:p>
             <a:fld id="{418CA6B7-7294-49BE-8894-FBC98B4D1603}" type="datetimeFigureOut">
               <a:rPr lang="en-US" smtClean="0"/>
-              <a:t>2/13/2026</a:t>
+              <a:t>3/5/2026</a:t>
             </a:fld>
             <a:endParaRPr lang="en-US" dirty="0"/>
           </a:p>
@@ -871,7 +871,7 @@
           <a:p>
             <a:fld id="{418CA6B7-7294-49BE-8894-FBC98B4D1603}" type="datetimeFigureOut">
               <a:rPr lang="en-US" smtClean="0"/>
-              <a:t>2/13/2026</a:t>
+              <a:t>3/5/2026</a:t>
             </a:fld>
             <a:endParaRPr lang="en-US" dirty="0"/>
           </a:p>
@@ -1147,7 +1147,7 @@
           <a:p>
             <a:fld id="{418CA6B7-7294-49BE-8894-FBC98B4D1603}" type="datetimeFigureOut">
               <a:rPr lang="en-US" smtClean="0"/>
-              <a:t>2/13/2026</a:t>
+              <a:t>3/5/2026</a:t>
             </a:fld>
             <a:endParaRPr lang="en-US" dirty="0"/>
           </a:p>
@@ -1415,7 +1415,7 @@
           <a:p>
             <a:fld id="{418CA6B7-7294-49BE-8894-FBC98B4D1603}" type="datetimeFigureOut">
               <a:rPr lang="en-US" smtClean="0"/>
-              <a:t>2/13/2026</a:t>
+              <a:t>3/5/2026</a:t>
             </a:fld>
             <a:endParaRPr lang="en-US" dirty="0"/>
           </a:p>
@@ -1830,7 +1830,7 @@
           <a:p>
             <a:fld id="{418CA6B7-7294-49BE-8894-FBC98B4D1603}" type="datetimeFigureOut">
               <a:rPr lang="en-US" smtClean="0"/>
-              <a:t>2/13/2026</a:t>
+              <a:t>3/5/2026</a:t>
             </a:fld>
             <a:endParaRPr lang="en-US" dirty="0"/>
           </a:p>
@@ -1972,7 +1972,7 @@
           <a:p>
             <a:fld id="{418CA6B7-7294-49BE-8894-FBC98B4D1603}" type="datetimeFigureOut">
               <a:rPr lang="en-US" smtClean="0"/>
-              <a:t>2/13/2026</a:t>
+              <a:t>3/5/2026</a:t>
             </a:fld>
             <a:endParaRPr lang="en-US" dirty="0"/>
           </a:p>
@@ -2085,7 +2085,7 @@
           <a:p>
             <a:fld id="{418CA6B7-7294-49BE-8894-FBC98B4D1603}" type="datetimeFigureOut">
               <a:rPr lang="en-US" smtClean="0"/>
-              <a:t>2/13/2026</a:t>
+              <a:t>3/5/2026</a:t>
             </a:fld>
             <a:endParaRPr lang="en-US" dirty="0"/>
           </a:p>
@@ -2398,7 +2398,7 @@
           <a:p>
             <a:fld id="{418CA6B7-7294-49BE-8894-FBC98B4D1603}" type="datetimeFigureOut">
               <a:rPr lang="en-US" smtClean="0"/>
-              <a:t>2/13/2026</a:t>
+              <a:t>3/5/2026</a:t>
             </a:fld>
             <a:endParaRPr lang="en-US" dirty="0"/>
           </a:p>
@@ -2687,7 +2687,7 @@
           <a:p>
             <a:fld id="{418CA6B7-7294-49BE-8894-FBC98B4D1603}" type="datetimeFigureOut">
               <a:rPr lang="en-US" smtClean="0"/>
-              <a:t>2/13/2026</a:t>
+              <a:t>3/5/2026</a:t>
             </a:fld>
             <a:endParaRPr lang="en-US" dirty="0"/>
           </a:p>
@@ -2930,7 +2930,7 @@
           <a:p>
             <a:fld id="{418CA6B7-7294-49BE-8894-FBC98B4D1603}" type="datetimeFigureOut">
               <a:rPr lang="en-US" smtClean="0"/>
-              <a:t>2/13/2026</a:t>
+              <a:t>3/5/2026</a:t>
             </a:fld>
             <a:endParaRPr lang="en-US" dirty="0"/>
           </a:p>
@@ -4978,6 +4978,122 @@
           </a:p>
         </p:txBody>
       </p:sp>
+      <p:pic>
+        <p:nvPicPr>
+          <p:cNvPr id="10" name="Image 9">
+            <a:extLst>
+              <a:ext uri="{FF2B5EF4-FFF2-40B4-BE49-F238E27FC236}">
+                <a16:creationId xmlns:a16="http://schemas.microsoft.com/office/drawing/2014/main" id="{D9767960-D964-B388-DA9B-646FE1E98C04}"/>
+              </a:ext>
+            </a:extLst>
+          </p:cNvPr>
+          <p:cNvPicPr>
+            <a:picLocks noChangeAspect="1"/>
+          </p:cNvPicPr>
+          <p:nvPr/>
+        </p:nvPicPr>
+        <p:blipFill>
+          <a:blip r:embed="rId11"/>
+          <a:stretch>
+            <a:fillRect/>
+          </a:stretch>
+        </p:blipFill>
+        <p:spPr>
+          <a:xfrm>
+            <a:off x="6042843" y="1009411"/>
+            <a:ext cx="1029074" cy="613625"/>
+          </a:xfrm>
+          <a:prstGeom prst="rect">
+            <a:avLst/>
+          </a:prstGeom>
+        </p:spPr>
+      </p:pic>
+      <p:sp>
+        <p:nvSpPr>
+          <p:cNvPr id="12" name="ZoneTexte 11">
+            <a:extLst>
+              <a:ext uri="{FF2B5EF4-FFF2-40B4-BE49-F238E27FC236}">
+                <a16:creationId xmlns:a16="http://schemas.microsoft.com/office/drawing/2014/main" id="{2F210206-4DA7-7CC3-B9C4-EA9711E58AB8}"/>
+              </a:ext>
+            </a:extLst>
+          </p:cNvPr>
+          <p:cNvSpPr txBox="1"/>
+          <p:nvPr/>
+        </p:nvSpPr>
+        <p:spPr>
+          <a:xfrm>
+            <a:off x="5891465" y="1587352"/>
+            <a:ext cx="1341779" cy="276999"/>
+          </a:xfrm>
+          <a:prstGeom prst="rect">
+            <a:avLst/>
+          </a:prstGeom>
+          <a:noFill/>
+        </p:spPr>
+        <p:txBody>
+          <a:bodyPr wrap="none" rtlCol="0">
+            <a:spAutoFit/>
+          </a:bodyPr>
+          <a:lstStyle/>
+          <a:p>
+            <a:pPr algn="ctr"/>
+            <a:r>
+              <a:rPr lang="fr-FR" sz="1200" dirty="0">
+                <a:latin typeface="Calibri" panose="020F0502020204030204" pitchFamily="34" charset="0"/>
+                <a:ea typeface="Calibri" panose="020F0502020204030204" pitchFamily="34" charset="0"/>
+                <a:cs typeface="Calibri" panose="020F0502020204030204" pitchFamily="34" charset="0"/>
+              </a:rPr>
+              <a:t>Artifact Correction</a:t>
+            </a:r>
+          </a:p>
+        </p:txBody>
+      </p:sp>
+      <p:cxnSp>
+        <p:nvCxnSpPr>
+          <p:cNvPr id="34" name="Connecteur droit 33">
+            <a:extLst>
+              <a:ext uri="{FF2B5EF4-FFF2-40B4-BE49-F238E27FC236}">
+                <a16:creationId xmlns:a16="http://schemas.microsoft.com/office/drawing/2014/main" id="{A40DD5EC-0E55-0B73-C5B4-1FABC1F6837B}"/>
+              </a:ext>
+            </a:extLst>
+          </p:cNvPr>
+          <p:cNvCxnSpPr>
+            <a:cxnSpLocks/>
+            <a:endCxn id="10" idx="1"/>
+          </p:cNvCxnSpPr>
+          <p:nvPr/>
+        </p:nvCxnSpPr>
+        <p:spPr>
+          <a:xfrm flipV="1">
+            <a:off x="4798196" y="1316224"/>
+            <a:ext cx="1244647" cy="1643308"/>
+          </a:xfrm>
+          <a:prstGeom prst="line">
+            <a:avLst/>
+          </a:prstGeom>
+          <a:ln w="12700">
+            <a:solidFill>
+              <a:srgbClr val="53A62A">
+                <a:alpha val="37000"/>
+              </a:srgbClr>
+            </a:solidFill>
+          </a:ln>
+        </p:spPr>
+        <p:style>
+          <a:lnRef idx="2">
+            <a:schemeClr val="accent1"/>
+          </a:lnRef>
+          <a:fillRef idx="0">
+            <a:schemeClr val="accent1"/>
+          </a:fillRef>
+          <a:effectRef idx="1">
+            <a:schemeClr val="accent1"/>
+          </a:effectRef>
+          <a:fontRef idx="minor">
+            <a:schemeClr val="tx1"/>
+          </a:fontRef>
+        </p:style>
+      </p:cxnSp>
     </p:spTree>
     <p:extLst>
       <p:ext uri="{BB962C8B-B14F-4D97-AF65-F5344CB8AC3E}">

--- a/docs/src/assets/Fig1_index.pptx
+++ b/docs/src/assets/Fig1_index.pptx
@@ -261,7 +261,7 @@
           <a:p>
             <a:fld id="{418CA6B7-7294-49BE-8894-FBC98B4D1603}" type="datetimeFigureOut">
               <a:rPr lang="en-US" smtClean="0"/>
-              <a:t>3/5/2026</a:t>
+              <a:t>4/11/2026</a:t>
             </a:fld>
             <a:endParaRPr lang="en-US" dirty="0"/>
           </a:p>
@@ -461,7 +461,7 @@
           <a:p>
             <a:fld id="{418CA6B7-7294-49BE-8894-FBC98B4D1603}" type="datetimeFigureOut">
               <a:rPr lang="en-US" smtClean="0"/>
-              <a:t>3/5/2026</a:t>
+              <a:t>4/11/2026</a:t>
             </a:fld>
             <a:endParaRPr lang="en-US" dirty="0"/>
           </a:p>
@@ -671,7 +671,7 @@
           <a:p>
             <a:fld id="{418CA6B7-7294-49BE-8894-FBC98B4D1603}" type="datetimeFigureOut">
               <a:rPr lang="en-US" smtClean="0"/>
-              <a:t>3/5/2026</a:t>
+              <a:t>4/11/2026</a:t>
             </a:fld>
             <a:endParaRPr lang="en-US" dirty="0"/>
           </a:p>
@@ -871,7 +871,7 @@
           <a:p>
             <a:fld id="{418CA6B7-7294-49BE-8894-FBC98B4D1603}" type="datetimeFigureOut">
               <a:rPr lang="en-US" smtClean="0"/>
-              <a:t>3/5/2026</a:t>
+              <a:t>4/11/2026</a:t>
             </a:fld>
             <a:endParaRPr lang="en-US" dirty="0"/>
           </a:p>
@@ -1147,7 +1147,7 @@
           <a:p>
             <a:fld id="{418CA6B7-7294-49BE-8894-FBC98B4D1603}" type="datetimeFigureOut">
               <a:rPr lang="en-US" smtClean="0"/>
-              <a:t>3/5/2026</a:t>
+              <a:t>4/11/2026</a:t>
             </a:fld>
             <a:endParaRPr lang="en-US" dirty="0"/>
           </a:p>
@@ -1415,7 +1415,7 @@
           <a:p>
             <a:fld id="{418CA6B7-7294-49BE-8894-FBC98B4D1603}" type="datetimeFigureOut">
               <a:rPr lang="en-US" smtClean="0"/>
-              <a:t>3/5/2026</a:t>
+              <a:t>4/11/2026</a:t>
             </a:fld>
             <a:endParaRPr lang="en-US" dirty="0"/>
           </a:p>
@@ -1830,7 +1830,7 @@
           <a:p>
             <a:fld id="{418CA6B7-7294-49BE-8894-FBC98B4D1603}" type="datetimeFigureOut">
               <a:rPr lang="en-US" smtClean="0"/>
-              <a:t>3/5/2026</a:t>
+              <a:t>4/11/2026</a:t>
             </a:fld>
             <a:endParaRPr lang="en-US" dirty="0"/>
           </a:p>
@@ -1972,7 +1972,7 @@
           <a:p>
             <a:fld id="{418CA6B7-7294-49BE-8894-FBC98B4D1603}" type="datetimeFigureOut">
               <a:rPr lang="en-US" smtClean="0"/>
-              <a:t>3/5/2026</a:t>
+              <a:t>4/11/2026</a:t>
             </a:fld>
             <a:endParaRPr lang="en-US" dirty="0"/>
           </a:p>
@@ -2085,7 +2085,7 @@
           <a:p>
             <a:fld id="{418CA6B7-7294-49BE-8894-FBC98B4D1603}" type="datetimeFigureOut">
               <a:rPr lang="en-US" smtClean="0"/>
-              <a:t>3/5/2026</a:t>
+              <a:t>4/11/2026</a:t>
             </a:fld>
             <a:endParaRPr lang="en-US" dirty="0"/>
           </a:p>
@@ -2398,7 +2398,7 @@
           <a:p>
             <a:fld id="{418CA6B7-7294-49BE-8894-FBC98B4D1603}" type="datetimeFigureOut">
               <a:rPr lang="en-US" smtClean="0"/>
-              <a:t>3/5/2026</a:t>
+              <a:t>4/11/2026</a:t>
             </a:fld>
             <a:endParaRPr lang="en-US" dirty="0"/>
           </a:p>
@@ -2687,7 +2687,7 @@
           <a:p>
             <a:fld id="{418CA6B7-7294-49BE-8894-FBC98B4D1603}" type="datetimeFigureOut">
               <a:rPr lang="en-US" smtClean="0"/>
-              <a:t>3/5/2026</a:t>
+              <a:t>4/11/2026</a:t>
             </a:fld>
             <a:endParaRPr lang="en-US" dirty="0"/>
           </a:p>
@@ -2930,7 +2930,7 @@
           <a:p>
             <a:fld id="{418CA6B7-7294-49BE-8894-FBC98B4D1603}" type="datetimeFigureOut">
               <a:rPr lang="en-US" smtClean="0"/>
-              <a:t>3/5/2026</a:t>
+              <a:t>4/11/2026</a:t>
             </a:fld>
             <a:endParaRPr lang="en-US" dirty="0"/>
           </a:p>
@@ -3347,6 +3347,147 @@
           <a:chExt cx="0" cy="0"/>
         </a:xfrm>
       </p:grpSpPr>
+      <p:cxnSp>
+        <p:nvCxnSpPr>
+          <p:cNvPr id="46" name="Connecteur droit 45">
+            <a:extLst>
+              <a:ext uri="{FF2B5EF4-FFF2-40B4-BE49-F238E27FC236}">
+                <a16:creationId xmlns:a16="http://schemas.microsoft.com/office/drawing/2014/main" id="{4AF6F007-1EC3-A5C9-B0D5-5F8F53968195}"/>
+              </a:ext>
+            </a:extLst>
+          </p:cNvPr>
+          <p:cNvCxnSpPr>
+            <a:cxnSpLocks/>
+          </p:cNvCxnSpPr>
+          <p:nvPr/>
+        </p:nvCxnSpPr>
+        <p:spPr>
+          <a:xfrm>
+            <a:off x="5667476" y="4042735"/>
+            <a:ext cx="769424" cy="271919"/>
+          </a:xfrm>
+          <a:prstGeom prst="line">
+            <a:avLst/>
+          </a:prstGeom>
+          <a:ln w="12700">
+            <a:solidFill>
+              <a:srgbClr val="53A62A">
+                <a:alpha val="37000"/>
+              </a:srgbClr>
+            </a:solidFill>
+            <a:headEnd type="oval" w="med" len="med"/>
+            <a:tailEnd type="oval" w="med" len="med"/>
+          </a:ln>
+        </p:spPr>
+        <p:style>
+          <a:lnRef idx="2">
+            <a:schemeClr val="accent1"/>
+          </a:lnRef>
+          <a:fillRef idx="0">
+            <a:schemeClr val="accent1"/>
+          </a:fillRef>
+          <a:effectRef idx="1">
+            <a:schemeClr val="accent1"/>
+          </a:effectRef>
+          <a:fontRef idx="minor">
+            <a:schemeClr val="tx1"/>
+          </a:fontRef>
+        </p:style>
+      </p:cxnSp>
+      <p:cxnSp>
+        <p:nvCxnSpPr>
+          <p:cNvPr id="6" name="Connecteur droit 5">
+            <a:extLst>
+              <a:ext uri="{FF2B5EF4-FFF2-40B4-BE49-F238E27FC236}">
+                <a16:creationId xmlns:a16="http://schemas.microsoft.com/office/drawing/2014/main" id="{477D36EC-4A1B-A4BF-DFFF-AB037E70B514}"/>
+              </a:ext>
+            </a:extLst>
+          </p:cNvPr>
+          <p:cNvCxnSpPr>
+            <a:cxnSpLocks/>
+          </p:cNvCxnSpPr>
+          <p:nvPr/>
+        </p:nvCxnSpPr>
+        <p:spPr>
+          <a:xfrm flipH="1" flipV="1">
+            <a:off x="2578569" y="1284303"/>
+            <a:ext cx="728886" cy="1078616"/>
+          </a:xfrm>
+          <a:prstGeom prst="line">
+            <a:avLst/>
+          </a:prstGeom>
+          <a:ln w="12700">
+            <a:solidFill>
+              <a:srgbClr val="53A62A">
+                <a:alpha val="37000"/>
+              </a:srgbClr>
+            </a:solidFill>
+            <a:headEnd type="oval" w="med" len="med"/>
+            <a:tailEnd type="oval" w="med" len="med"/>
+          </a:ln>
+        </p:spPr>
+        <p:style>
+          <a:lnRef idx="2">
+            <a:schemeClr val="accent1"/>
+          </a:lnRef>
+          <a:fillRef idx="0">
+            <a:schemeClr val="accent1"/>
+          </a:fillRef>
+          <a:effectRef idx="1">
+            <a:schemeClr val="accent1"/>
+          </a:effectRef>
+          <a:fontRef idx="minor">
+            <a:schemeClr val="tx1"/>
+          </a:fontRef>
+        </p:style>
+      </p:cxnSp>
+      <p:cxnSp>
+        <p:nvCxnSpPr>
+          <p:cNvPr id="34" name="Connecteur droit 33">
+            <a:extLst>
+              <a:ext uri="{FF2B5EF4-FFF2-40B4-BE49-F238E27FC236}">
+                <a16:creationId xmlns:a16="http://schemas.microsoft.com/office/drawing/2014/main" id="{A40DD5EC-0E55-0B73-C5B4-1FABC1F6837B}"/>
+              </a:ext>
+            </a:extLst>
+          </p:cNvPr>
+          <p:cNvCxnSpPr>
+            <a:cxnSpLocks/>
+          </p:cNvCxnSpPr>
+          <p:nvPr/>
+        </p:nvCxnSpPr>
+        <p:spPr>
+          <a:xfrm flipV="1">
+            <a:off x="5302051" y="1386756"/>
+            <a:ext cx="780637" cy="1065328"/>
+          </a:xfrm>
+          <a:prstGeom prst="line">
+            <a:avLst/>
+          </a:prstGeom>
+          <a:ln w="12700">
+            <a:solidFill>
+              <a:srgbClr val="53A62A">
+                <a:alpha val="37000"/>
+              </a:srgbClr>
+            </a:solidFill>
+            <a:headEnd type="oval" w="med" len="med"/>
+            <a:tailEnd type="oval" w="med" len="med"/>
+          </a:ln>
+        </p:spPr>
+        <p:style>
+          <a:lnRef idx="2">
+            <a:schemeClr val="accent1"/>
+          </a:lnRef>
+          <a:fillRef idx="0">
+            <a:schemeClr val="accent1"/>
+          </a:fillRef>
+          <a:effectRef idx="1">
+            <a:schemeClr val="accent1"/>
+          </a:effectRef>
+          <a:fontRef idx="minor">
+            <a:schemeClr val="tx1"/>
+          </a:fontRef>
+        </p:style>
+      </p:cxnSp>
       <p:sp>
         <p:nvSpPr>
           <p:cNvPr id="39" name="Rectangle : coins arrondis 38">
@@ -3361,8 +3502,8 @@
         </p:nvSpPr>
         <p:spPr>
           <a:xfrm>
-            <a:off x="7729269" y="346703"/>
-            <a:ext cx="2221189" cy="5248013"/>
+            <a:off x="7901803" y="346703"/>
+            <a:ext cx="2221189" cy="5477797"/>
           </a:xfrm>
           <a:prstGeom prst="roundRect">
             <a:avLst/>
@@ -3498,7 +3639,7 @@
         </p:blipFill>
         <p:spPr>
           <a:xfrm>
-            <a:off x="5895941" y="2524854"/>
+            <a:off x="5706165" y="2524854"/>
             <a:ext cx="1410353" cy="853082"/>
           </a:xfrm>
           <a:prstGeom prst="rect">
@@ -3534,8 +3675,8 @@
         </p:blipFill>
         <p:spPr>
           <a:xfrm>
-            <a:off x="5440601" y="4780195"/>
-            <a:ext cx="624570" cy="621553"/>
+            <a:off x="5081595" y="4827911"/>
+            <a:ext cx="543412" cy="540787"/>
           </a:xfrm>
           <a:prstGeom prst="rect">
             <a:avLst/>
@@ -3570,8 +3711,8 @@
         </p:blipFill>
         <p:spPr>
           <a:xfrm>
-            <a:off x="2310387" y="4765807"/>
-            <a:ext cx="1081726" cy="681372"/>
+            <a:off x="2319733" y="4795343"/>
+            <a:ext cx="1034836" cy="651836"/>
           </a:xfrm>
           <a:prstGeom prst="rect">
             <a:avLst/>
@@ -3606,7 +3747,7 @@
         </p:blipFill>
         <p:spPr>
           <a:xfrm>
-            <a:off x="1431168" y="2524592"/>
+            <a:off x="1569188" y="2524592"/>
             <a:ext cx="1102160" cy="762931"/>
           </a:xfrm>
           <a:prstGeom prst="rect">
@@ -3628,8 +3769,8 @@
         </p:nvSpPr>
         <p:spPr>
           <a:xfrm>
-            <a:off x="1970766" y="1520630"/>
-            <a:ext cx="4653792" cy="3611741"/>
+            <a:off x="2088622" y="1520630"/>
+            <a:ext cx="4232750" cy="3611741"/>
           </a:xfrm>
           <a:prstGeom prst="pentagon">
             <a:avLst/>
@@ -3729,7 +3870,7 @@
         </p:nvSpPr>
         <p:spPr>
           <a:xfrm>
-            <a:off x="2112827" y="4487807"/>
+            <a:off x="2106845" y="4518344"/>
             <a:ext cx="1521891" cy="292388"/>
           </a:xfrm>
           <a:prstGeom prst="rect">
@@ -3817,7 +3958,7 @@
         </p:nvSpPr>
         <p:spPr>
           <a:xfrm>
-            <a:off x="4961571" y="4479160"/>
+            <a:off x="4568330" y="4533733"/>
             <a:ext cx="1453796" cy="292388"/>
           </a:xfrm>
           <a:prstGeom prst="rect">
@@ -3861,7 +4002,7 @@
         </p:nvSpPr>
         <p:spPr>
           <a:xfrm>
-            <a:off x="7797304" y="3106739"/>
+            <a:off x="7969838" y="3132617"/>
             <a:ext cx="2153154" cy="430887"/>
           </a:xfrm>
           <a:prstGeom prst="rect">
@@ -3915,7 +4056,7 @@
         </p:nvSpPr>
         <p:spPr>
           <a:xfrm>
-            <a:off x="1303083" y="2297264"/>
+            <a:off x="1441103" y="2297264"/>
             <a:ext cx="1377365" cy="292388"/>
           </a:xfrm>
           <a:prstGeom prst="rect">
@@ -3959,7 +4100,7 @@
         </p:nvSpPr>
         <p:spPr>
           <a:xfrm>
-            <a:off x="974209" y="3275986"/>
+            <a:off x="1112229" y="3275986"/>
             <a:ext cx="1993113" cy="646331"/>
           </a:xfrm>
           <a:prstGeom prst="rect">
@@ -4026,7 +4167,7 @@
         </p:nvSpPr>
         <p:spPr>
           <a:xfrm>
-            <a:off x="5942687" y="3220592"/>
+            <a:off x="5752911" y="3220592"/>
             <a:ext cx="1261885" cy="461665"/>
           </a:xfrm>
           <a:prstGeom prst="rect">
@@ -4082,7 +4223,7 @@
         </p:nvSpPr>
         <p:spPr>
           <a:xfrm>
-            <a:off x="5765265" y="2305890"/>
+            <a:off x="5575489" y="2305890"/>
             <a:ext cx="1643399" cy="292388"/>
           </a:xfrm>
           <a:prstGeom prst="rect">
@@ -4226,7 +4367,7 @@
         </p:nvSpPr>
         <p:spPr>
           <a:xfrm>
-            <a:off x="7805387" y="4288905"/>
+            <a:off x="7977921" y="4383791"/>
             <a:ext cx="1751377" cy="276999"/>
           </a:xfrm>
           <a:prstGeom prst="rect">
@@ -4285,7 +4426,7 @@
         </p:blipFill>
         <p:spPr bwMode="auto">
           <a:xfrm>
-            <a:off x="8860532" y="940091"/>
+            <a:off x="9033066" y="940091"/>
             <a:ext cx="890831" cy="890831"/>
           </a:xfrm>
           <a:prstGeom prst="rect">
@@ -4317,7 +4458,7 @@
         </p:nvSpPr>
         <p:spPr>
           <a:xfrm>
-            <a:off x="7805387" y="2678200"/>
+            <a:off x="7977921" y="2704078"/>
             <a:ext cx="1751313" cy="461665"/>
           </a:xfrm>
           <a:prstGeom prst="rect">
@@ -4371,8 +4512,8 @@
         </p:nvSpPr>
         <p:spPr>
           <a:xfrm>
-            <a:off x="4192645" y="5418308"/>
-            <a:ext cx="3204726" cy="276999"/>
+            <a:off x="3773933" y="5362835"/>
+            <a:ext cx="3204726" cy="461665"/>
           </a:xfrm>
           <a:prstGeom prst="rect">
             <a:avLst/>
@@ -4392,7 +4533,18 @@
                 <a:ea typeface="Calibri" panose="020F0502020204030204" pitchFamily="34" charset="0"/>
                 <a:cs typeface="Calibri" panose="020F0502020204030204" pitchFamily="34" charset="0"/>
               </a:rPr>
-              <a:t>Spatial filters, Blind Source Separation</a:t>
+              <a:t>Spatial filters, </a:t>
+            </a:r>
+          </a:p>
+          <a:p>
+            <a:pPr algn="ctr"/>
+            <a:r>
+              <a:rPr lang="fr-FR" sz="1200" dirty="0">
+                <a:latin typeface="Calibri" panose="020F0502020204030204" pitchFamily="34" charset="0"/>
+                <a:ea typeface="Calibri" panose="020F0502020204030204" pitchFamily="34" charset="0"/>
+                <a:cs typeface="Calibri" panose="020F0502020204030204" pitchFamily="34" charset="0"/>
+              </a:rPr>
+              <a:t>Blind Source Separation</a:t>
             </a:r>
             <a:endParaRPr lang="en-US" sz="1200" dirty="0">
               <a:latin typeface="Calibri" panose="020F0502020204030204" pitchFamily="34" charset="0"/>
@@ -4416,7 +4568,7 @@
         </p:nvSpPr>
         <p:spPr>
           <a:xfrm>
-            <a:off x="7805387" y="3665005"/>
+            <a:off x="7977921" y="3708135"/>
             <a:ext cx="539571" cy="276999"/>
           </a:xfrm>
           <a:prstGeom prst="rect">
@@ -4460,7 +4612,7 @@
         </p:nvSpPr>
         <p:spPr>
           <a:xfrm>
-            <a:off x="7805676" y="3911930"/>
+            <a:off x="7978210" y="3955060"/>
             <a:ext cx="1552028" cy="261610"/>
           </a:xfrm>
           <a:prstGeom prst="rect">
@@ -4504,7 +4656,7 @@
         </p:nvSpPr>
         <p:spPr>
           <a:xfrm>
-            <a:off x="7805676" y="4533733"/>
+            <a:off x="7978210" y="4628619"/>
             <a:ext cx="1511952" cy="261610"/>
           </a:xfrm>
           <a:prstGeom prst="rect">
@@ -4563,7 +4715,7 @@
         </p:blipFill>
         <p:spPr bwMode="auto">
           <a:xfrm>
-            <a:off x="7814013" y="923669"/>
+            <a:off x="7986547" y="923669"/>
             <a:ext cx="890831" cy="890831"/>
           </a:xfrm>
           <a:prstGeom prst="rect">
@@ -4595,7 +4747,7 @@
         </p:nvSpPr>
         <p:spPr>
           <a:xfrm>
-            <a:off x="7796761" y="2053403"/>
+            <a:off x="7969295" y="2053403"/>
             <a:ext cx="1189493" cy="276999"/>
           </a:xfrm>
           <a:prstGeom prst="rect">
@@ -4639,7 +4791,7 @@
         </p:nvSpPr>
         <p:spPr>
           <a:xfrm>
-            <a:off x="7797304" y="2299897"/>
+            <a:off x="7969838" y="2299897"/>
             <a:ext cx="1871025" cy="261610"/>
           </a:xfrm>
           <a:prstGeom prst="rect">
@@ -4730,7 +4882,7 @@
         </p:nvSpPr>
         <p:spPr>
           <a:xfrm>
-            <a:off x="8031474" y="415664"/>
+            <a:off x="8204008" y="415664"/>
             <a:ext cx="1525226" cy="400110"/>
           </a:xfrm>
           <a:prstGeom prst="rect">
@@ -4805,51 +4957,6 @@
           </a:prstGeom>
         </p:spPr>
       </p:pic>
-      <p:cxnSp>
-        <p:nvCxnSpPr>
-          <p:cNvPr id="6" name="Connecteur droit 5">
-            <a:extLst>
-              <a:ext uri="{FF2B5EF4-FFF2-40B4-BE49-F238E27FC236}">
-                <a16:creationId xmlns:a16="http://schemas.microsoft.com/office/drawing/2014/main" id="{477D36EC-4A1B-A4BF-DFFF-AB037E70B514}"/>
-              </a:ext>
-            </a:extLst>
-          </p:cNvPr>
-          <p:cNvCxnSpPr>
-            <a:cxnSpLocks/>
-          </p:cNvCxnSpPr>
-          <p:nvPr/>
-        </p:nvCxnSpPr>
-        <p:spPr>
-          <a:xfrm flipH="1" flipV="1">
-            <a:off x="2579452" y="1402091"/>
-            <a:ext cx="1142478" cy="1574026"/>
-          </a:xfrm>
-          <a:prstGeom prst="line">
-            <a:avLst/>
-          </a:prstGeom>
-          <a:ln w="12700">
-            <a:solidFill>
-              <a:srgbClr val="53A62A">
-                <a:alpha val="37000"/>
-              </a:srgbClr>
-            </a:solidFill>
-          </a:ln>
-        </p:spPr>
-        <p:style>
-          <a:lnRef idx="2">
-            <a:schemeClr val="accent1"/>
-          </a:lnRef>
-          <a:fillRef idx="0">
-            <a:schemeClr val="accent1"/>
-          </a:fillRef>
-          <a:effectRef idx="1">
-            <a:schemeClr val="accent1"/>
-          </a:effectRef>
-          <a:fontRef idx="minor">
-            <a:schemeClr val="tx1"/>
-          </a:fontRef>
-        </p:style>
-      </p:cxnSp>
       <p:sp>
         <p:nvSpPr>
           <p:cNvPr id="8" name="ZoneTexte 7">
@@ -4904,7 +5011,7 @@
         </p:nvSpPr>
         <p:spPr>
           <a:xfrm>
-            <a:off x="7811142" y="4924385"/>
+            <a:off x="7983676" y="5062401"/>
             <a:ext cx="731419" cy="276999"/>
           </a:xfrm>
           <a:prstGeom prst="rect">
@@ -4919,7 +5026,7 @@
           <a:lstStyle/>
           <a:p>
             <a:r>
-              <a:rPr lang="fr-FR" sz="1200" b="1" dirty="0" err="1">
+              <a:rPr lang="fr-FR" sz="1200" b="1" dirty="0">
                 <a:latin typeface="Calibri" panose="020F0502020204030204" pitchFamily="34" charset="0"/>
                 <a:ea typeface="Calibri" panose="020F0502020204030204" pitchFamily="34" charset="0"/>
                 <a:cs typeface="Calibri" panose="020F0502020204030204" pitchFamily="34" charset="0"/>
@@ -4948,7 +5055,7 @@
         </p:nvSpPr>
         <p:spPr>
           <a:xfrm>
-            <a:off x="7811431" y="5169213"/>
+            <a:off x="7983965" y="5307229"/>
             <a:ext cx="755335" cy="261610"/>
           </a:xfrm>
           <a:prstGeom prst="rect">
@@ -5048,52 +5155,87 @@
           </a:p>
         </p:txBody>
       </p:sp>
-      <p:cxnSp>
-        <p:nvCxnSpPr>
-          <p:cNvPr id="34" name="Connecteur droit 33">
-            <a:extLst>
-              <a:ext uri="{FF2B5EF4-FFF2-40B4-BE49-F238E27FC236}">
-                <a16:creationId xmlns:a16="http://schemas.microsoft.com/office/drawing/2014/main" id="{A40DD5EC-0E55-0B73-C5B4-1FABC1F6837B}"/>
-              </a:ext>
-            </a:extLst>
-          </p:cNvPr>
-          <p:cNvCxnSpPr>
-            <a:cxnSpLocks/>
-            <a:endCxn id="10" idx="1"/>
-          </p:cNvCxnSpPr>
+      <p:pic>
+        <p:nvPicPr>
+          <p:cNvPr id="44" name="Image 43">
+            <a:extLst>
+              <a:ext uri="{FF2B5EF4-FFF2-40B4-BE49-F238E27FC236}">
+                <a16:creationId xmlns:a16="http://schemas.microsoft.com/office/drawing/2014/main" id="{17C6E7B8-739C-5AA3-F47E-CD59DE1C268F}"/>
+              </a:ext>
+            </a:extLst>
+          </p:cNvPr>
+          <p:cNvPicPr>
+            <a:picLocks noChangeAspect="1"/>
+          </p:cNvPicPr>
           <p:nvPr/>
-        </p:nvCxnSpPr>
-        <p:spPr>
-          <a:xfrm flipV="1">
-            <a:off x="4798196" y="1316224"/>
-            <a:ext cx="1244647" cy="1643308"/>
-          </a:xfrm>
-          <a:prstGeom prst="line">
+        </p:nvPicPr>
+        <p:blipFill>
+          <a:blip r:embed="rId12"/>
+          <a:stretch>
+            <a:fillRect/>
+          </a:stretch>
+        </p:blipFill>
+        <p:spPr>
+          <a:xfrm>
+            <a:off x="6260230" y="3942004"/>
+            <a:ext cx="1161151" cy="595828"/>
+          </a:xfrm>
+          <a:prstGeom prst="rect">
             <a:avLst/>
           </a:prstGeom>
-          <a:ln w="12700">
-            <a:solidFill>
-              <a:srgbClr val="53A62A">
-                <a:alpha val="37000"/>
-              </a:srgbClr>
-            </a:solidFill>
-          </a:ln>
-        </p:spPr>
-        <p:style>
-          <a:lnRef idx="2">
-            <a:schemeClr val="accent1"/>
-          </a:lnRef>
-          <a:fillRef idx="0">
-            <a:schemeClr val="accent1"/>
-          </a:fillRef>
-          <a:effectRef idx="1">
-            <a:schemeClr val="accent1"/>
-          </a:effectRef>
-          <a:fontRef idx="minor">
-            <a:schemeClr val="tx1"/>
-          </a:fontRef>
-        </p:style>
-      </p:cxnSp>
+        </p:spPr>
+      </p:pic>
+      <p:sp>
+        <p:nvSpPr>
+          <p:cNvPr id="45" name="ZoneTexte 44">
+            <a:extLst>
+              <a:ext uri="{FF2B5EF4-FFF2-40B4-BE49-F238E27FC236}">
+                <a16:creationId xmlns:a16="http://schemas.microsoft.com/office/drawing/2014/main" id="{73742DF1-39B0-1674-7A7E-92FF8E76EFC8}"/>
+              </a:ext>
+            </a:extLst>
+          </p:cNvPr>
+          <p:cNvSpPr txBox="1"/>
+          <p:nvPr/>
+        </p:nvSpPr>
+        <p:spPr>
+          <a:xfrm>
+            <a:off x="6062422" y="4519196"/>
+            <a:ext cx="1553823" cy="461665"/>
+          </a:xfrm>
+          <a:prstGeom prst="rect">
+            <a:avLst/>
+          </a:prstGeom>
+          <a:noFill/>
+        </p:spPr>
+        <p:txBody>
+          <a:bodyPr wrap="none" rtlCol="0">
+            <a:spAutoFit/>
+          </a:bodyPr>
+          <a:lstStyle/>
+          <a:p>
+            <a:pPr algn="ctr"/>
+            <a:r>
+              <a:rPr lang="fr-FR" sz="1200" dirty="0">
+                <a:latin typeface="Calibri" panose="020F0502020204030204" pitchFamily="34" charset="0"/>
+                <a:ea typeface="Calibri" panose="020F0502020204030204" pitchFamily="34" charset="0"/>
+                <a:cs typeface="Calibri" panose="020F0502020204030204" pitchFamily="34" charset="0"/>
+              </a:rPr>
+              <a:t>Peak Frequency</a:t>
+            </a:r>
+          </a:p>
+          <a:p>
+            <a:pPr algn="ctr"/>
+            <a:r>
+              <a:rPr lang="fr-FR" sz="1200" dirty="0">
+                <a:latin typeface="Calibri" panose="020F0502020204030204" pitchFamily="34" charset="0"/>
+                <a:ea typeface="Calibri" panose="020F0502020204030204" pitchFamily="34" charset="0"/>
+                <a:cs typeface="Calibri" panose="020F0502020204030204" pitchFamily="34" charset="0"/>
+              </a:rPr>
+              <a:t>Aperiodic Component</a:t>
+            </a:r>
+          </a:p>
+        </p:txBody>
+      </p:sp>
     </p:spTree>
     <p:extLst>
       <p:ext uri="{BB962C8B-B14F-4D97-AF65-F5344CB8AC3E}">

--- a/docs/src/assets/Fig1_index.pptx
+++ b/docs/src/assets/Fig1_index.pptx
@@ -261,7 +261,7 @@
           <a:p>
             <a:fld id="{418CA6B7-7294-49BE-8894-FBC98B4D1603}" type="datetimeFigureOut">
               <a:rPr lang="en-US" smtClean="0"/>
-              <a:t>4/11/2026</a:t>
+              <a:t>6/2/2026</a:t>
             </a:fld>
             <a:endParaRPr lang="en-US" dirty="0"/>
           </a:p>
@@ -461,7 +461,7 @@
           <a:p>
             <a:fld id="{418CA6B7-7294-49BE-8894-FBC98B4D1603}" type="datetimeFigureOut">
               <a:rPr lang="en-US" smtClean="0"/>
-              <a:t>4/11/2026</a:t>
+              <a:t>6/2/2026</a:t>
             </a:fld>
             <a:endParaRPr lang="en-US" dirty="0"/>
           </a:p>
@@ -671,7 +671,7 @@
           <a:p>
             <a:fld id="{418CA6B7-7294-49BE-8894-FBC98B4D1603}" type="datetimeFigureOut">
               <a:rPr lang="en-US" smtClean="0"/>
-              <a:t>4/11/2026</a:t>
+              <a:t>6/2/2026</a:t>
             </a:fld>
             <a:endParaRPr lang="en-US" dirty="0"/>
           </a:p>
@@ -871,7 +871,7 @@
           <a:p>
             <a:fld id="{418CA6B7-7294-49BE-8894-FBC98B4D1603}" type="datetimeFigureOut">
               <a:rPr lang="en-US" smtClean="0"/>
-              <a:t>4/11/2026</a:t>
+              <a:t>6/2/2026</a:t>
             </a:fld>
             <a:endParaRPr lang="en-US" dirty="0"/>
           </a:p>
@@ -1147,7 +1147,7 @@
           <a:p>
             <a:fld id="{418CA6B7-7294-49BE-8894-FBC98B4D1603}" type="datetimeFigureOut">
               <a:rPr lang="en-US" smtClean="0"/>
-              <a:t>4/11/2026</a:t>
+              <a:t>6/2/2026</a:t>
             </a:fld>
             <a:endParaRPr lang="en-US" dirty="0"/>
           </a:p>
@@ -1415,7 +1415,7 @@
           <a:p>
             <a:fld id="{418CA6B7-7294-49BE-8894-FBC98B4D1603}" type="datetimeFigureOut">
               <a:rPr lang="en-US" smtClean="0"/>
-              <a:t>4/11/2026</a:t>
+              <a:t>6/2/2026</a:t>
             </a:fld>
             <a:endParaRPr lang="en-US" dirty="0"/>
           </a:p>
@@ -1830,7 +1830,7 @@
           <a:p>
             <a:fld id="{418CA6B7-7294-49BE-8894-FBC98B4D1603}" type="datetimeFigureOut">
               <a:rPr lang="en-US" smtClean="0"/>
-              <a:t>4/11/2026</a:t>
+              <a:t>6/2/2026</a:t>
             </a:fld>
             <a:endParaRPr lang="en-US" dirty="0"/>
           </a:p>
@@ -1972,7 +1972,7 @@
           <a:p>
             <a:fld id="{418CA6B7-7294-49BE-8894-FBC98B4D1603}" type="datetimeFigureOut">
               <a:rPr lang="en-US" smtClean="0"/>
-              <a:t>4/11/2026</a:t>
+              <a:t>6/2/2026</a:t>
             </a:fld>
             <a:endParaRPr lang="en-US" dirty="0"/>
           </a:p>
@@ -2085,7 +2085,7 @@
           <a:p>
             <a:fld id="{418CA6B7-7294-49BE-8894-FBC98B4D1603}" type="datetimeFigureOut">
               <a:rPr lang="en-US" smtClean="0"/>
-              <a:t>4/11/2026</a:t>
+              <a:t>6/2/2026</a:t>
             </a:fld>
             <a:endParaRPr lang="en-US" dirty="0"/>
           </a:p>
@@ -2398,7 +2398,7 @@
           <a:p>
             <a:fld id="{418CA6B7-7294-49BE-8894-FBC98B4D1603}" type="datetimeFigureOut">
               <a:rPr lang="en-US" smtClean="0"/>
-              <a:t>4/11/2026</a:t>
+              <a:t>6/2/2026</a:t>
             </a:fld>
             <a:endParaRPr lang="en-US" dirty="0"/>
           </a:p>
@@ -2687,7 +2687,7 @@
           <a:p>
             <a:fld id="{418CA6B7-7294-49BE-8894-FBC98B4D1603}" type="datetimeFigureOut">
               <a:rPr lang="en-US" smtClean="0"/>
-              <a:t>4/11/2026</a:t>
+              <a:t>6/2/2026</a:t>
             </a:fld>
             <a:endParaRPr lang="en-US" dirty="0"/>
           </a:p>
@@ -2930,7 +2930,7 @@
           <a:p>
             <a:fld id="{418CA6B7-7294-49BE-8894-FBC98B4D1603}" type="datetimeFigureOut">
               <a:rPr lang="en-US" smtClean="0"/>
-              <a:t>4/11/2026</a:t>
+              <a:t>6/2/2026</a:t>
             </a:fld>
             <a:endParaRPr lang="en-US" dirty="0"/>
           </a:p>
@@ -3405,13 +3405,14 @@
           </p:cNvPr>
           <p:cNvCxnSpPr>
             <a:cxnSpLocks/>
+            <a:endCxn id="3" idx="3"/>
           </p:cNvCxnSpPr>
           <p:nvPr/>
         </p:nvCxnSpPr>
         <p:spPr>
           <a:xfrm flipH="1" flipV="1">
-            <a:off x="2578569" y="1284303"/>
-            <a:ext cx="728886" cy="1078616"/>
+            <a:off x="2763189" y="1478863"/>
+            <a:ext cx="544266" cy="884056"/>
           </a:xfrm>
           <a:prstGeom prst="line">
             <a:avLst/>
@@ -3639,7 +3640,7 @@
         </p:blipFill>
         <p:spPr>
           <a:xfrm>
-            <a:off x="5706165" y="2524854"/>
+            <a:off x="5616195" y="2532215"/>
             <a:ext cx="1410353" cy="853082"/>
           </a:xfrm>
           <a:prstGeom prst="rect">
@@ -3711,7 +3712,7 @@
         </p:blipFill>
         <p:spPr>
           <a:xfrm>
-            <a:off x="2319733" y="4795343"/>
+            <a:off x="2431871" y="4795343"/>
             <a:ext cx="1034836" cy="651836"/>
           </a:xfrm>
           <a:prstGeom prst="rect">
@@ -3870,7 +3871,7 @@
         </p:nvSpPr>
         <p:spPr>
           <a:xfrm>
-            <a:off x="2106845" y="4518344"/>
+            <a:off x="2218983" y="4518344"/>
             <a:ext cx="1521891" cy="292388"/>
           </a:xfrm>
           <a:prstGeom prst="rect">
@@ -3914,7 +3915,7 @@
         </p:nvSpPr>
         <p:spPr>
           <a:xfrm>
-            <a:off x="2219386" y="5386910"/>
+            <a:off x="2331524" y="5386910"/>
             <a:ext cx="1242584" cy="276999"/>
           </a:xfrm>
           <a:prstGeom prst="rect">
@@ -4167,7 +4168,7 @@
         </p:nvSpPr>
         <p:spPr>
           <a:xfrm>
-            <a:off x="5752911" y="3220592"/>
+            <a:off x="5661146" y="3198167"/>
             <a:ext cx="1261885" cy="461665"/>
           </a:xfrm>
           <a:prstGeom prst="rect">
@@ -4223,7 +4224,7 @@
         </p:nvSpPr>
         <p:spPr>
           <a:xfrm>
-            <a:off x="5575489" y="2305890"/>
+            <a:off x="5436433" y="2313136"/>
             <a:ext cx="1643399" cy="292388"/>
           </a:xfrm>
           <a:prstGeom prst="rect">
@@ -4949,7 +4950,7 @@
         </p:blipFill>
         <p:spPr>
           <a:xfrm>
-            <a:off x="1723416" y="1013426"/>
+            <a:off x="1810889" y="1159678"/>
             <a:ext cx="952300" cy="638370"/>
           </a:xfrm>
           <a:prstGeom prst="rect">
@@ -4971,7 +4972,7 @@
         </p:nvSpPr>
         <p:spPr>
           <a:xfrm>
-            <a:off x="1618468" y="1592175"/>
+            <a:off x="1702924" y="1729743"/>
             <a:ext cx="1245598" cy="276999"/>
           </a:xfrm>
           <a:prstGeom prst="rect">
@@ -5107,7 +5108,7 @@
         </p:blipFill>
         <p:spPr>
           <a:xfrm>
-            <a:off x="6042843" y="1009411"/>
+            <a:off x="5947956" y="1138801"/>
             <a:ext cx="1029074" cy="613625"/>
           </a:xfrm>
           <a:prstGeom prst="rect">
@@ -5129,7 +5130,7 @@
         </p:nvSpPr>
         <p:spPr>
           <a:xfrm>
-            <a:off x="5891465" y="1587352"/>
+            <a:off x="5796578" y="1716742"/>
             <a:ext cx="1341779" cy="276999"/>
           </a:xfrm>
           <a:prstGeom prst="rect">
@@ -5236,6 +5237,123 @@
           </a:p>
         </p:txBody>
       </p:sp>
+      <p:pic>
+        <p:nvPicPr>
+          <p:cNvPr id="14" name="Image 13">
+            <a:extLst>
+              <a:ext uri="{FF2B5EF4-FFF2-40B4-BE49-F238E27FC236}">
+                <a16:creationId xmlns:a16="http://schemas.microsoft.com/office/drawing/2014/main" id="{A5C53F9D-AAB0-E908-4633-E0693DC1E64C}"/>
+              </a:ext>
+            </a:extLst>
+          </p:cNvPr>
+          <p:cNvPicPr>
+            <a:picLocks noChangeAspect="1"/>
+          </p:cNvPicPr>
+          <p:nvPr/>
+        </p:nvPicPr>
+        <p:blipFill>
+          <a:blip r:embed="rId13"/>
+          <a:stretch>
+            <a:fillRect/>
+          </a:stretch>
+        </p:blipFill>
+        <p:spPr>
+          <a:xfrm>
+            <a:off x="825810" y="4140710"/>
+            <a:ext cx="1175995" cy="618714"/>
+          </a:xfrm>
+          <a:prstGeom prst="rect">
+            <a:avLst/>
+          </a:prstGeom>
+        </p:spPr>
+      </p:pic>
+      <p:sp>
+        <p:nvSpPr>
+          <p:cNvPr id="40" name="ZoneTexte 39">
+            <a:extLst>
+              <a:ext uri="{FF2B5EF4-FFF2-40B4-BE49-F238E27FC236}">
+                <a16:creationId xmlns:a16="http://schemas.microsoft.com/office/drawing/2014/main" id="{70C5AAB2-4DCC-79FA-5359-F441089681E6}"/>
+              </a:ext>
+            </a:extLst>
+          </p:cNvPr>
+          <p:cNvSpPr txBox="1"/>
+          <p:nvPr/>
+        </p:nvSpPr>
+        <p:spPr>
+          <a:xfrm>
+            <a:off x="737800" y="4721754"/>
+            <a:ext cx="1335815" cy="276999"/>
+          </a:xfrm>
+          <a:prstGeom prst="rect">
+            <a:avLst/>
+          </a:prstGeom>
+          <a:noFill/>
+        </p:spPr>
+        <p:txBody>
+          <a:bodyPr wrap="none" rtlCol="0">
+            <a:spAutoFit/>
+          </a:bodyPr>
+          <a:lstStyle/>
+          <a:p>
+            <a:pPr algn="ctr"/>
+            <a:r>
+              <a:rPr lang="fr-FR" sz="1200" dirty="0">
+                <a:latin typeface="Calibri" panose="020F0502020204030204" pitchFamily="34" charset="0"/>
+                <a:ea typeface="Calibri" panose="020F0502020204030204" pitchFamily="34" charset="0"/>
+                <a:cs typeface="Calibri" panose="020F0502020204030204" pitchFamily="34" charset="0"/>
+              </a:rPr>
+              <a:t>Leadfield Matrices</a:t>
+            </a:r>
+          </a:p>
+        </p:txBody>
+      </p:sp>
+      <p:cxnSp>
+        <p:nvCxnSpPr>
+          <p:cNvPr id="41" name="Connecteur droit 40">
+            <a:extLst>
+              <a:ext uri="{FF2B5EF4-FFF2-40B4-BE49-F238E27FC236}">
+                <a16:creationId xmlns:a16="http://schemas.microsoft.com/office/drawing/2014/main" id="{E526884F-E5D9-65CE-EAC5-D3B2220407CC}"/>
+              </a:ext>
+            </a:extLst>
+          </p:cNvPr>
+          <p:cNvCxnSpPr>
+            <a:cxnSpLocks/>
+          </p:cNvCxnSpPr>
+          <p:nvPr/>
+        </p:nvCxnSpPr>
+        <p:spPr>
+          <a:xfrm flipV="1">
+            <a:off x="1956606" y="4084371"/>
+            <a:ext cx="806967" cy="203509"/>
+          </a:xfrm>
+          <a:prstGeom prst="line">
+            <a:avLst/>
+          </a:prstGeom>
+          <a:ln w="12700">
+            <a:solidFill>
+              <a:srgbClr val="53A62A">
+                <a:alpha val="37000"/>
+              </a:srgbClr>
+            </a:solidFill>
+            <a:headEnd type="oval" w="med" len="med"/>
+            <a:tailEnd type="oval" w="med" len="med"/>
+          </a:ln>
+        </p:spPr>
+        <p:style>
+          <a:lnRef idx="2">
+            <a:schemeClr val="accent1"/>
+          </a:lnRef>
+          <a:fillRef idx="0">
+            <a:schemeClr val="accent1"/>
+          </a:fillRef>
+          <a:effectRef idx="1">
+            <a:schemeClr val="accent1"/>
+          </a:effectRef>
+          <a:fontRef idx="minor">
+            <a:schemeClr val="tx1"/>
+          </a:fontRef>
+        </p:style>
+      </p:cxnSp>
     </p:spTree>
     <p:extLst>
       <p:ext uri="{BB962C8B-B14F-4D97-AF65-F5344CB8AC3E}">
